--- a/docs/slides/Hypershift_Pooled_Datasets_2022_2025.pptx
+++ b/docs/slides/Hypershift_Pooled_Datasets_2022_2025.pptx
@@ -3630,7 +3630,7 @@
                           <a:ea typeface="Arial"/>
                           <a:cs typeface="Arial"/>
                         </a:rPr>
-                        <a:t>SPY and QQQ</a:t>
+                        <a:t>Cohort controls</a:t>
                       </a:r>
                     </a:p>
                   </a:txBody>
@@ -3654,7 +3654,7 @@
                           <a:ea typeface="Arial"/>
                           <a:cs typeface="Arial"/>
                         </a:rPr>
-                        <a:t>2 ETFs</a:t>
+                        <a:t>3 controls</a:t>
                       </a:r>
                     </a:p>
                   </a:txBody>
@@ -3678,7 +3678,7 @@
                           <a:ea typeface="Arial"/>
                           <a:cs typeface="Arial"/>
                         </a:rPr>
-                        <a:t>Both available</a:t>
+                        <a:t>2022–2025</a:t>
                       </a:r>
                     </a:p>
                   </a:txBody>
@@ -5403,7 +5403,7 @@
                 <a:ea typeface="Arial"/>
                 <a:cs typeface="Arial"/>
               </a:rPr>
-              <a:t>Controls: SPY (S&amp;P 500) and QQQ (Nasdaq-100), evaluated on each model’s dates.</a:t>
+              <a:t>NYSE: simulated basket. NASDAQ: QQQ. SPY: broad market. NYSX has no 2022–2025 history.</a:t>
             </a:r>
           </a:p>
         </p:txBody>
@@ -5912,7 +5912,7 @@
                 <a:ea typeface="Arial"/>
                 <a:cs typeface="Arial"/>
               </a:rPr>
-              <a:t>Matched ETF controls</a:t>
+              <a:t>Matched cohort controls</a:t>
             </a:r>
           </a:p>
         </p:txBody>
@@ -5980,7 +5980,7 @@
                 <a:ea typeface="Arial"/>
                 <a:cs typeface="Arial"/>
               </a:rPr>
-              <a:t>SPY and QQQ use the same evaluated dates as each model. Separate curves compare daily forecasts and five-session forecasts after costs.</a:t>
+              <a:t>Cohort references use matched dates: a simulated basket for NYSE, QQQ for NASDAQ and SPY for context. NYSX launched March 25, 2026.</a:t>
             </a:r>
           </a:p>
         </p:txBody>
